--- a/examples/ppt/presentation.pptx
+++ b/examples/ppt/presentation.pptx
@@ -5,12 +5,12 @@
     <p:sldMasterId xmlns:r="http://schemas.openxmlformats.org/officeDocument/2006/relationships" id="2147483648" r:id="rId1"/>
   </p:sldMasterIdLst>
   <p:sldIdLst>
-    <p:sldId id="256" r:id="R190dd378ba964bf7"/>
-    <p:sldId id="257" r:id="Rc48f9f23a68c40bb"/>
-    <p:sldId id="258" r:id="R89952375a85248ee"/>
-    <p:sldId id="259" r:id="R0708d1789cfa4f0f"/>
-    <p:sldId id="260" r:id="R79c46e57cc414d93"/>
-    <p:sldId id="261" r:id="Rbe29a3359c264068"/>
+    <p:sldId id="256" r:id="Rbfd0ac5e1aa14192"/>
+    <p:sldId id="257" r:id="Rbab1b093580d47fe"/>
+    <p:sldId id="258" r:id="Rdd1c68efc74a4fa8"/>
+    <p:sldId id="259" r:id="Rd35a91721c1a4971"/>
+    <p:sldId id="260" r:id="R149745de411d42aa"/>
+    <p:sldId id="261" r:id="R3afb078f669a4129"/>
   </p:sldIdLst>
   <p:sldSz cx="12192000" cy="6858000"/>
   <p:notesSz cx="6858000" cy="9144000"/>
@@ -73,7 +73,7 @@
             <a:spLocks xmlns:a="http://schemas.openxmlformats.org/drawingml/2006/main" noGrp="1"/>
           </p:cNvSpPr>
           <p:nvPr>
-            <p:ph type="subTitle"/>
+            <p:ph type="subTitle" idx="1"/>
           </p:nvPr>
         </p:nvSpPr>
         <p:spPr>
@@ -136,7 +136,7 @@
             <a:spLocks xmlns:a="http://schemas.openxmlformats.org/drawingml/2006/main" noGrp="1"/>
           </p:cNvSpPr>
           <p:nvPr>
-            <p:ph type="body"/>
+            <p:ph type="body" idx="1"/>
           </p:nvPr>
         </p:nvSpPr>
         <p:spPr>
@@ -199,7 +199,7 @@
             <a:spLocks xmlns:a="http://schemas.openxmlformats.org/drawingml/2006/main" noGrp="1"/>
           </p:cNvSpPr>
           <p:nvPr>
-            <p:ph type="body"/>
+            <p:ph type="body" idx="1"/>
           </p:nvPr>
         </p:nvSpPr>
         <p:spPr>
@@ -223,7 +223,7 @@
             <a:spLocks xmlns:a="http://schemas.openxmlformats.org/drawingml/2006/main" noGrp="1"/>
           </p:cNvSpPr>
           <p:nvPr>
-            <p:ph type="body"/>
+            <p:ph type="body" idx="2"/>
           </p:nvPr>
         </p:nvSpPr>
         <p:spPr>
@@ -285,7 +285,7 @@
 </file>
 
 <file path=ppt/slideMasters/slideMaster1.xml><?xml version="1.0" encoding="utf-8"?>
-<p:sldMaster xmlns:p="http://schemas.openxmlformats.org/presentationml/2006/main">
+<p:sldMaster xmlns:r="http://schemas.openxmlformats.org/officeDocument/2006/relationships" xmlns:p="http://schemas.openxmlformats.org/presentationml/2006/main">
   <p:cSld>
     <p:spTree>
       <p:nvGrpSpPr>
@@ -308,7 +308,7 @@
 </file>
 
 <file path=ppt/slides/slide1.xml><?xml version="1.0" encoding="utf-8"?>
-<p:sld xmlns:a="http://schemas.openxmlformats.org/drawingml/2006/main" xmlns:p="http://schemas.openxmlformats.org/presentationml/2006/main">
+<p:sld xmlns:p="http://schemas.openxmlformats.org/presentationml/2006/main">
   <p:cSld xmlns:p="http://schemas.openxmlformats.org/presentationml/2006/main">
     <p:bg>
       <p:bgPr>
@@ -553,7 +553,7 @@
 </file>
 
 <file path=ppt/slides/slide2.xml><?xml version="1.0" encoding="utf-8"?>
-<p:sld xmlns:a="http://schemas.openxmlformats.org/drawingml/2006/main" xmlns:p="http://schemas.openxmlformats.org/presentationml/2006/main">
+<p:sld xmlns:p="http://schemas.openxmlformats.org/presentationml/2006/main">
   <p:cSld xmlns:p="http://schemas.openxmlformats.org/presentationml/2006/main">
     <p:bg>
       <p:bgPr>
@@ -867,7 +867,7 @@
 </file>
 
 <file path=ppt/slides/slide3.xml><?xml version="1.0" encoding="utf-8"?>
-<p:sld xmlns:a="http://schemas.openxmlformats.org/drawingml/2006/main" xmlns:p="http://schemas.openxmlformats.org/presentationml/2006/main">
+<p:sld xmlns:p="http://schemas.openxmlformats.org/presentationml/2006/main">
   <p:cSld xmlns:p="http://schemas.openxmlformats.org/presentationml/2006/main">
     <p:bg>
       <p:bgPr>
@@ -1205,7 +1205,7 @@
 </file>
 
 <file path=ppt/slides/slide4.xml><?xml version="1.0" encoding="utf-8"?>
-<p:sld xmlns:a="http://schemas.openxmlformats.org/drawingml/2006/main" xmlns:p="http://schemas.openxmlformats.org/presentationml/2006/main">
+<p:sld xmlns:p="http://schemas.openxmlformats.org/presentationml/2006/main">
   <p:cSld xmlns:p="http://schemas.openxmlformats.org/presentationml/2006/main">
     <p:bg>
       <p:bgPr>
@@ -1404,7 +1404,7 @@
 </file>
 
 <file path=ppt/slides/slide5.xml><?xml version="1.0" encoding="utf-8"?>
-<p:sld xmlns:a="http://schemas.openxmlformats.org/drawingml/2006/main" xmlns:p="http://schemas.openxmlformats.org/presentationml/2006/main">
+<p:sld xmlns:p="http://schemas.openxmlformats.org/presentationml/2006/main">
   <p:cSld xmlns:p="http://schemas.openxmlformats.org/presentationml/2006/main">
     <p:bg>
       <p:bgPr>
@@ -1849,7 +1849,7 @@
 </file>
 
 <file path=ppt/slides/slide6.xml><?xml version="1.0" encoding="utf-8"?>
-<p:sld xmlns:a="http://schemas.openxmlformats.org/drawingml/2006/main" xmlns:p="http://schemas.openxmlformats.org/presentationml/2006/main">
+<p:sld xmlns:p="http://schemas.openxmlformats.org/presentationml/2006/main">
   <p:cSld xmlns:p="http://schemas.openxmlformats.org/presentationml/2006/main">
     <p:bg>
       <p:bgPr>
